--- a/presentation/WealthPilot_Presentation.pptx
+++ b/presentation/WealthPilot_Presentation.pptx
@@ -7211,7 +7211,7 @@
                 <a:ea typeface="Calibri" pitchFamily="34" charset="-122"/>
                 <a:cs typeface="Calibri" pitchFamily="34" charset="-120"/>
               </a:rPr>
-              <a:t>18/20 golden-set items passed guardrails clean; an injection attempt against the live API correctly returns HTTP 422</a:t>
+              <a:t>20/20 golden-set items passed guardrails clean; an injection attempt against the live API correctly returns HTTP 422</a:t>
             </a:r>
             <a:endParaRPr lang="en-US" sz="1350" dirty="0"/>
           </a:p>
@@ -7232,7 +7232,7 @@
                 <a:ea typeface="Calibri" pitchFamily="34" charset="-122"/>
                 <a:cs typeface="Calibri" pitchFamily="34" charset="-120"/>
               </a:rPr>
-              <a:t>FastAPI /health + /decision deployment package, verified with a real HTTP round-trip</a:t>
+              <a:t>FastAPI /health, /decision, /chat, deployed with a live public ngrok tunnel and verified from an external browser</a:t>
             </a:r>
             <a:endParaRPr lang="en-US" sz="1350" dirty="0"/>
           </a:p>
@@ -7842,7 +7842,7 @@
                 <a:ea typeface="Calibri" pitchFamily="34" charset="-122"/>
                 <a:cs typeface="Calibri" pitchFamily="34" charset="-120"/>
               </a:rPr>
-              <a:t>7/20 golden-set items passed end-to-end; 18/20 guardrails clean</a:t>
+              <a:t>19/20 golden-set items passed end-to-end; 20/20 guardrails clean; 3-judge score 1.0 faithfulness</a:t>
             </a:r>
             <a:endParaRPr lang="en-US" sz="1300" dirty="0"/>
           </a:p>
@@ -7947,7 +7947,7 @@
                 <a:ea typeface="Calibri" pitchFamily="34" charset="-122"/>
                 <a:cs typeface="Calibri" pitchFamily="34" charset="-120"/>
               </a:rPr>
-              <a:t>The 7/20 eval score is reported as-is, not tuned to look better. Failures cluster in auto-generated questions with retrieval gaps — the hand-written adversarial cases (bias probes, injection attempts) mostly passed. A low score with clean guardrails is a more useful signal than a suspiciously perfect one.</a:t>
+              <a:t>The score started at 6/20 -- two real bugs found and fixed while verifying it, not a looser check. The eval generator was exploding citation-title strings into individual characters, and the citation checker didn't resolve the model's bracket-style citations. Both fixed at the source; the model's answers never changed.</a:t>
             </a:r>
             <a:endParaRPr lang="en-US" sz="1200" dirty="0"/>
           </a:p>
